--- a/slides/S2_Besturingssysteem.pptx
+++ b/slides/S2_Besturingssysteem.pptx
@@ -205,7 +205,7 @@
           <a:p>
             <a:fld id="{DAA656B2-ED32-8044-9B2A-829653741135}" type="datetimeFigureOut">
               <a:rPr lang="nl-NL" smtClean="0"/>
-              <a:t>7-4-2026</a:t>
+              <a:t>08-04-2026</a:t>
             </a:fld>
             <a:endParaRPr lang="nl-NL"/>
           </a:p>
@@ -1059,7 +1059,7 @@
           <a:p>
             <a:fld id="{3A7CBCB4-1EFE-4E3B-9C8A-BCC4F06648F3}" type="datetimeFigureOut">
               <a:rPr lang="en-NL" smtClean="0"/>
-              <a:t>04/07/2026</a:t>
+              <a:t>4/8/26</a:t>
             </a:fld>
             <a:endParaRPr lang="en-NL"/>
           </a:p>
@@ -1259,7 +1259,7 @@
           <a:p>
             <a:fld id="{3A7CBCB4-1EFE-4E3B-9C8A-BCC4F06648F3}" type="datetimeFigureOut">
               <a:rPr lang="en-NL" smtClean="0"/>
-              <a:t>04/07/2026</a:t>
+              <a:t>4/8/26</a:t>
             </a:fld>
             <a:endParaRPr lang="en-NL"/>
           </a:p>
@@ -1469,7 +1469,7 @@
           <a:p>
             <a:fld id="{3A7CBCB4-1EFE-4E3B-9C8A-BCC4F06648F3}" type="datetimeFigureOut">
               <a:rPr lang="en-NL" smtClean="0"/>
-              <a:t>04/07/2026</a:t>
+              <a:t>4/8/26</a:t>
             </a:fld>
             <a:endParaRPr lang="en-NL"/>
           </a:p>
@@ -1669,7 +1669,7 @@
           <a:p>
             <a:fld id="{3A7CBCB4-1EFE-4E3B-9C8A-BCC4F06648F3}" type="datetimeFigureOut">
               <a:rPr lang="en-NL" smtClean="0"/>
-              <a:t>04/07/2026</a:t>
+              <a:t>4/8/26</a:t>
             </a:fld>
             <a:endParaRPr lang="en-NL"/>
           </a:p>
@@ -1945,7 +1945,7 @@
           <a:p>
             <a:fld id="{3A7CBCB4-1EFE-4E3B-9C8A-BCC4F06648F3}" type="datetimeFigureOut">
               <a:rPr lang="en-NL" smtClean="0"/>
-              <a:t>04/07/2026</a:t>
+              <a:t>4/8/26</a:t>
             </a:fld>
             <a:endParaRPr lang="en-NL"/>
           </a:p>
@@ -2213,7 +2213,7 @@
           <a:p>
             <a:fld id="{3A7CBCB4-1EFE-4E3B-9C8A-BCC4F06648F3}" type="datetimeFigureOut">
               <a:rPr lang="en-NL" smtClean="0"/>
-              <a:t>04/07/2026</a:t>
+              <a:t>4/8/26</a:t>
             </a:fld>
             <a:endParaRPr lang="en-NL"/>
           </a:p>
@@ -2628,7 +2628,7 @@
           <a:p>
             <a:fld id="{3A7CBCB4-1EFE-4E3B-9C8A-BCC4F06648F3}" type="datetimeFigureOut">
               <a:rPr lang="en-NL" smtClean="0"/>
-              <a:t>04/07/2026</a:t>
+              <a:t>4/8/26</a:t>
             </a:fld>
             <a:endParaRPr lang="en-NL"/>
           </a:p>
@@ -2770,7 +2770,7 @@
           <a:p>
             <a:fld id="{3A7CBCB4-1EFE-4E3B-9C8A-BCC4F06648F3}" type="datetimeFigureOut">
               <a:rPr lang="en-NL" smtClean="0"/>
-              <a:t>04/07/2026</a:t>
+              <a:t>4/8/26</a:t>
             </a:fld>
             <a:endParaRPr lang="en-NL"/>
           </a:p>
@@ -2883,7 +2883,7 @@
           <a:p>
             <a:fld id="{3A7CBCB4-1EFE-4E3B-9C8A-BCC4F06648F3}" type="datetimeFigureOut">
               <a:rPr lang="en-NL" smtClean="0"/>
-              <a:t>04/07/2026</a:t>
+              <a:t>4/8/26</a:t>
             </a:fld>
             <a:endParaRPr lang="en-NL"/>
           </a:p>
@@ -3196,7 +3196,7 @@
           <a:p>
             <a:fld id="{3A7CBCB4-1EFE-4E3B-9C8A-BCC4F06648F3}" type="datetimeFigureOut">
               <a:rPr lang="en-NL" smtClean="0"/>
-              <a:t>04/07/2026</a:t>
+              <a:t>4/8/26</a:t>
             </a:fld>
             <a:endParaRPr lang="en-NL"/>
           </a:p>
@@ -3485,7 +3485,7 @@
           <a:p>
             <a:fld id="{3A7CBCB4-1EFE-4E3B-9C8A-BCC4F06648F3}" type="datetimeFigureOut">
               <a:rPr lang="en-NL" smtClean="0"/>
-              <a:t>04/07/2026</a:t>
+              <a:t>4/8/26</a:t>
             </a:fld>
             <a:endParaRPr lang="en-NL"/>
           </a:p>
@@ -3728,7 +3728,7 @@
           <a:p>
             <a:fld id="{3A7CBCB4-1EFE-4E3B-9C8A-BCC4F06648F3}" type="datetimeFigureOut">
               <a:rPr lang="en-NL" smtClean="0"/>
-              <a:t>04/07/2026</a:t>
+              <a:t>4/8/26</a:t>
             </a:fld>
             <a:endParaRPr lang="en-NL"/>
           </a:p>
@@ -4333,7 +4333,7 @@
         <p:spPr>
           <a:xfrm>
             <a:off x="3879175" y="2721114"/>
-            <a:ext cx="4433650" cy="707886"/>
+            <a:ext cx="4676088" cy="707886"/>
           </a:xfrm>
           <a:prstGeom prst="rect">
             <a:avLst/>
@@ -4347,10 +4347,9 @@
           <a:lstStyle/>
           <a:p>
             <a:r>
-              <a:rPr lang="nl-NL" sz="4000" dirty="0" err="1"/>
-              <a:t>Besturingssytemen</a:t>
-            </a:r>
-            <a:endParaRPr lang="nl-NL" sz="4000" dirty="0"/>
+              <a:rPr lang="nl-NL" sz="4000" dirty="0"/>
+              <a:t>Besturingssystemen</a:t>
+            </a:r>
           </a:p>
         </p:txBody>
       </p:sp>
@@ -5535,10 +5534,10 @@
           <p:nvPr/>
         </p:nvPicPr>
         <p:blipFill>
-          <a:blip r:embed="rId5">
+          <a:blip>
             <a:extLst>
               <a:ext uri="{96DAC541-7B7A-43D3-8B79-37D633B846F1}">
-                <asvg:svgBlip xmlns:asvg="http://schemas.microsoft.com/office/drawing/2016/SVG/main" r:embed="rId6"/>
+                <asvg:svgBlip xmlns:asvg="http://schemas.microsoft.com/office/drawing/2016/SVG/main" r:embed="rId5"/>
               </a:ext>
             </a:extLst>
           </a:blip>
@@ -5571,7 +5570,7 @@
           <p:nvPr/>
         </p:nvPicPr>
         <p:blipFill>
-          <a:blip r:embed="rId7">
+          <a:blip r:embed="rId6">
             <a:extLst>
               <a:ext uri="{28A0092B-C50C-407E-A947-70E740481C1C}">
                 <a14:useLocalDpi xmlns:a14="http://schemas.microsoft.com/office/drawing/2010/main" val="0"/>
